--- a/songs/song-01/song.pptx
+++ b/songs/song-01/song.pptx
@@ -5,12 +5,11 @@
     <p:sldMasterId id="2147483695" r:id="rId1"/>
   </p:sldMasterIdLst>
   <p:sldIdLst>
-    <p:sldId id="256" r:id="rId56"/>
-    <p:sldId id="257" r:id="rId57"/>
-    <p:sldId id="258" r:id="rId58"/>
-    <p:sldId id="259" r:id="rId59"/>
-    <p:sldId id="260" r:id="rId60"/>
-    <p:sldId id="261" r:id="rId61"/>
+    <p:sldId id="256" r:id="rId2"/>
+    <p:sldId id="257" r:id="rId3"/>
+    <p:sldId id="258" r:id="rId4"/>
+    <p:sldId id="259" r:id="rId5"/>
+    <p:sldId id="260" r:id="rId6"/>
   </p:sldIdLst>
   <p:sldSz cx="12192000" cy="6858000"/>
   <p:notesSz cx="6858000" cy="9144000"/>
@@ -269,7 +268,7 @@
               <a:pPr lvl="0">
                 <a:defRPr/>
               </a:pPr>
-              <a:t>2026. 6. 19.</a:t>
+              <a:t>2026. 6. 21.</a:t>
             </a:fld>
             <a:endParaRPr lang="ko-KR" altLang="en-US"/>
           </a:p>
@@ -461,7 +460,7 @@
               <a:pPr lvl="0">
                 <a:defRPr/>
               </a:pPr>
-              <a:t>2026. 6. 19.</a:t>
+              <a:t>2026. 6. 21.</a:t>
             </a:fld>
             <a:endParaRPr lang="ko-KR" altLang="en-US"/>
           </a:p>
@@ -663,7 +662,7 @@
               <a:pPr lvl="0">
                 <a:defRPr/>
               </a:pPr>
-              <a:t>2026. 6. 19.</a:t>
+              <a:t>2026. 6. 21.</a:t>
             </a:fld>
             <a:endParaRPr lang="ko-KR" altLang="en-US"/>
           </a:p>
@@ -863,7 +862,7 @@
               <a:pPr lvl="0">
                 <a:defRPr/>
               </a:pPr>
-              <a:t>2026. 6. 19.</a:t>
+              <a:t>2026. 6. 21.</a:t>
             </a:fld>
             <a:endParaRPr lang="ko-KR" altLang="en-US"/>
           </a:p>
@@ -1124,7 +1123,7 @@
               <a:pPr lvl="0">
                 <a:defRPr/>
               </a:pPr>
-              <a:t>2026. 6. 19.</a:t>
+              <a:t>2026. 6. 21.</a:t>
             </a:fld>
             <a:endParaRPr lang="ko-KR" altLang="en-US"/>
           </a:p>
@@ -1387,7 +1386,7 @@
               <a:pPr lvl="0">
                 <a:defRPr/>
               </a:pPr>
-              <a:t>2026. 6. 19.</a:t>
+              <a:t>2026. 6. 21.</a:t>
             </a:fld>
             <a:endParaRPr lang="ko-KR" altLang="en-US"/>
           </a:p>
@@ -1789,7 +1788,7 @@
               <a:pPr lvl="0">
                 <a:defRPr/>
               </a:pPr>
-              <a:t>2026. 6. 19.</a:t>
+              <a:t>2026. 6. 21.</a:t>
             </a:fld>
             <a:endParaRPr lang="ko-KR" altLang="en-US"/>
           </a:p>
@@ -1920,7 +1919,7 @@
               <a:pPr lvl="0">
                 <a:defRPr/>
               </a:pPr>
-              <a:t>2026. 6. 19.</a:t>
+              <a:t>2026. 6. 21.</a:t>
             </a:fld>
             <a:endParaRPr lang="ko-KR" altLang="en-US"/>
           </a:p>
@@ -2026,7 +2025,7 @@
               <a:pPr lvl="0">
                 <a:defRPr/>
               </a:pPr>
-              <a:t>2026. 6. 19.</a:t>
+              <a:t>2026. 6. 21.</a:t>
             </a:fld>
             <a:endParaRPr lang="ko-KR" altLang="en-US"/>
           </a:p>
@@ -2327,7 +2326,7 @@
               <a:pPr lvl="0">
                 <a:defRPr/>
               </a:pPr>
-              <a:t>2026. 6. 19.</a:t>
+              <a:t>2026. 6. 21.</a:t>
             </a:fld>
             <a:endParaRPr lang="ko-KR" altLang="en-US"/>
           </a:p>
@@ -2598,7 +2597,7 @@
               <a:pPr lvl="0">
                 <a:defRPr/>
               </a:pPr>
-              <a:t>2026. 6. 19.</a:t>
+              <a:t>2026. 6. 21.</a:t>
             </a:fld>
             <a:endParaRPr lang="ko-KR" altLang="en-US"/>
           </a:p>
@@ -2836,7 +2835,7 @@
               <a:pPr lvl="0">
                 <a:defRPr/>
               </a:pPr>
-              <a:t>2026. 6. 19.</a:t>
+              <a:t>2026. 6. 21.</a:t>
             </a:fld>
             <a:endParaRPr lang="ko-KR" altLang="en-US"/>
           </a:p>
@@ -3298,40 +3297,6 @@
               <a:defRPr/>
             </a:pPr>
             <a:r>
-              <a:rPr lang="en-US" altLang="ko-KR" sz="9600" b="1" spc="-300" dirty="0">
-                <a:ln w="9525">
-                  <a:solidFill>
-                    <a:prstClr val="black"/>
-                  </a:solidFill>
-                </a:ln>
-                <a:solidFill>
-                  <a:srgbClr val="FFFF00"/>
-                </a:solidFill>
-                <a:latin typeface="휴먼모음T" panose="02030504000101010101" pitchFamily="18" charset="-127"/>
-                <a:ea typeface="휴먼모음T" panose="02030504000101010101" pitchFamily="18" charset="-127"/>
-              </a:rPr>
-              <a:t>1</a:t>
-            </a:r>
-            <a:r>
-              <a:rPr kumimoji="0" lang="en-US" altLang="ko-KR" sz="9600" b="1" i="0" u="none" strike="noStrike" kern="1200" cap="none" spc="-300" normalizeH="0" baseline="0" noProof="0" dirty="0">
-                <a:ln w="9525">
-                  <a:solidFill>
-                    <a:prstClr val="black"/>
-                  </a:solidFill>
-                </a:ln>
-                <a:solidFill>
-                  <a:srgbClr val="FFFF00"/>
-                </a:solidFill>
-                <a:effectLst/>
-                <a:uLnTx/>
-                <a:uFillTx/>
-                <a:latin typeface="휴먼모음T" panose="02030504000101010101" pitchFamily="18" charset="-127"/>
-                <a:ea typeface="휴먼모음T" panose="02030504000101010101" pitchFamily="18" charset="-127"/>
-                <a:cs typeface="+mn-cs"/>
-              </a:rPr>
-              <a:t>. </a:t>
-            </a:r>
-            <a:r>
               <a:rPr kumimoji="0" lang="ko-KR" altLang="en-US" sz="9600" b="1" i="0" u="none" strike="noStrike" kern="1200" cap="none" spc="-300" normalizeH="0" baseline="0" noProof="0" dirty="0">
                 <a:ln w="9525">
                   <a:solidFill>
@@ -4062,7 +4027,7 @@
                 <a:ea typeface="휴먼모음T" panose="02030504000101010101" pitchFamily="18" charset="-127"/>
                 <a:cs typeface="+mn-cs"/>
               </a:rPr>
-              <a:t>B</a:t>
+              <a:t>Ba</a:t>
             </a:r>
             <a:r>
               <a:rPr lang="ko-KR" altLang="en-US" sz="7200" b="1" spc="-300" dirty="0">
@@ -4338,7 +4303,7 @@
                 <a:ea typeface="휴먼모음T" panose="02030504000101010101" pitchFamily="18" charset="-127"/>
                 <a:cs typeface="+mn-cs"/>
               </a:rPr>
-              <a:t>B</a:t>
+              <a:t>Bb</a:t>
             </a:r>
             <a:r>
               <a:rPr lang="ko-KR" altLang="en-US" sz="7200" b="1" spc="-300" dirty="0">
@@ -4511,241 +4476,6 @@
     <p:extLst>
       <p:ext uri="{BB962C8B-B14F-4D97-AF65-F5344CB8AC3E}">
         <p14:creationId xmlns:p14="http://schemas.microsoft.com/office/powerpoint/2010/main" val="3207718885"/>
-      </p:ext>
-    </p:extLst>
-  </p:cSld>
-  <p:clrMapOvr>
-    <a:masterClrMapping/>
-  </p:clrMapOvr>
-  <mc:AlternateContent xmlns:mc="http://schemas.openxmlformats.org/markup-compatibility/2006" xmlns:p14="http://schemas.microsoft.com/office/powerpoint/2010/main">
-    <mc:Choice Requires="p14">
-      <p:transition p14:dur="0"/>
-    </mc:Choice>
-    <mc:Fallback xmlns="">
-      <p:transition/>
-    </mc:Fallback>
-  </mc:AlternateContent>
-</p:sld>
-</file>
-
-<file path=ppt/slides/slide6.xml><?xml version="1.0" encoding="utf-8"?>
-<p:sld xmlns:a="http://schemas.openxmlformats.org/drawingml/2006/main" xmlns:r="http://schemas.openxmlformats.org/officeDocument/2006/relationships" xmlns:p="http://schemas.openxmlformats.org/presentationml/2006/main">
-  <p:cSld>
-    <p:spTree>
-      <p:nvGrpSpPr>
-        <p:cNvPr id="1" name="">
-          <a:extLst>
-            <a:ext uri="{FF2B5EF4-FFF2-40B4-BE49-F238E27FC236}">
-              <a16:creationId xmlns:a16="http://schemas.microsoft.com/office/drawing/2014/main" id="{BABF3105-970F-4DDB-59CA-B6EB108FFB72}"/>
-            </a:ext>
-          </a:extLst>
-        </p:cNvPr>
-        <p:cNvGrpSpPr/>
-        <p:nvPr/>
-      </p:nvGrpSpPr>
-      <p:grpSpPr>
-        <a:xfrm>
-          <a:off x="0" y="0"/>
-          <a:ext cx="0" cy="0"/>
-          <a:chOff x="0" y="0"/>
-          <a:chExt cx="0" cy="0"/>
-        </a:xfrm>
-      </p:grpSpPr>
-      <p:sp>
-        <p:nvSpPr>
-          <p:cNvPr id="7" name="TextBox 6">
-            <a:extLst>
-              <a:ext uri="{FF2B5EF4-FFF2-40B4-BE49-F238E27FC236}">
-                <a16:creationId xmlns:a16="http://schemas.microsoft.com/office/drawing/2014/main" id="{56E02355-A964-A194-3167-3523E075B4EB}"/>
-              </a:ext>
-            </a:extLst>
-          </p:cNvPr>
-          <p:cNvSpPr txBox="1"/>
-          <p:nvPr/>
-        </p:nvSpPr>
-        <p:spPr>
-          <a:xfrm>
-            <a:off x="0" y="635506"/>
-            <a:ext cx="12192000" cy="4437456"/>
-          </a:xfrm>
-          <a:prstGeom prst="rect">
-            <a:avLst/>
-          </a:prstGeom>
-          <a:noFill/>
-        </p:spPr>
-        <p:txBody>
-          <a:bodyPr wrap="square">
-            <a:noAutofit/>
-          </a:bodyPr>
-          <a:lstStyle/>
-          <a:p>
-            <a:pPr marL="0" marR="0" lvl="0" indent="0" algn="ctr" defTabSz="914400" rtl="0" eaLnBrk="1" fontAlgn="auto" latinLnBrk="1" hangingPunct="1">
-              <a:lnSpc>
-                <a:spcPct val="100000"/>
-              </a:lnSpc>
-              <a:spcBef>
-                <a:spcPts val="0"/>
-              </a:spcBef>
-              <a:spcAft>
-                <a:spcPts val="0"/>
-              </a:spcAft>
-              <a:buClrTx/>
-              <a:buSzTx/>
-              <a:buFontTx/>
-              <a:buNone/>
-              <a:tabLst/>
-              <a:defRPr/>
-            </a:pPr>
-            <a:r>
-              <a:rPr kumimoji="0" lang="ko-KR" altLang="en-US" sz="15000" b="1" i="0" u="none" strike="noStrike" kern="1200" cap="none" spc="-300" normalizeH="0" baseline="0" noProof="0" dirty="0">
-                <a:ln w="9525">
-                  <a:solidFill>
-                    <a:prstClr val="black"/>
-                  </a:solidFill>
-                </a:ln>
-                <a:solidFill>
-                  <a:prstClr val="white"/>
-                </a:solidFill>
-                <a:effectLst/>
-                <a:uLnTx/>
-                <a:uFillTx/>
-                <a:latin typeface="휴먼모음T" panose="02030504000101010101" pitchFamily="18" charset="-127"/>
-                <a:ea typeface="휴먼모음T" panose="02030504000101010101" pitchFamily="18" charset="-127"/>
-                <a:cs typeface="+mn-cs"/>
-              </a:rPr>
-              <a:t>간주</a:t>
-            </a:r>
-            <a:endParaRPr kumimoji="0" lang="en-US" altLang="ko-KR" sz="15000" b="1" i="0" u="none" strike="noStrike" kern="1200" cap="none" spc="0" normalizeH="0" baseline="0" noProof="0" dirty="0">
-              <a:ln w="9525">
-                <a:solidFill>
-                  <a:prstClr val="black"/>
-                </a:solidFill>
-              </a:ln>
-              <a:solidFill>
-                <a:prstClr val="white"/>
-              </a:solidFill>
-              <a:effectLst/>
-              <a:uLnTx/>
-              <a:uFillTx/>
-              <a:latin typeface="휴먼모음T" panose="02030504000101010101" pitchFamily="18" charset="-127"/>
-              <a:ea typeface="휴먼모음T" panose="02030504000101010101" pitchFamily="18" charset="-127"/>
-              <a:cs typeface="+mn-cs"/>
-            </a:endParaRPr>
-          </a:p>
-        </p:txBody>
-      </p:sp>
-      <p:sp>
-        <p:nvSpPr>
-          <p:cNvPr id="3" name="직사각형 2">
-            <a:extLst>
-              <a:ext uri="{FF2B5EF4-FFF2-40B4-BE49-F238E27FC236}">
-                <a16:creationId xmlns:a16="http://schemas.microsoft.com/office/drawing/2014/main" id="{922028BC-7F16-41EC-93AB-EB74FF4D7F72}"/>
-              </a:ext>
-            </a:extLst>
-          </p:cNvPr>
-          <p:cNvSpPr/>
-          <p:nvPr/>
-        </p:nvSpPr>
-        <p:spPr>
-          <a:xfrm>
-            <a:off x="0" y="2956787"/>
-            <a:ext cx="12192000" cy="830997"/>
-          </a:xfrm>
-          <a:prstGeom prst="rect">
-            <a:avLst/>
-          </a:prstGeom>
-        </p:spPr>
-        <p:txBody>
-          <a:bodyPr wrap="square">
-            <a:spAutoFit/>
-          </a:bodyPr>
-          <a:lstStyle/>
-          <a:p>
-            <a:pPr lvl="0" algn="ctr">
-              <a:defRPr/>
-            </a:pPr>
-            <a:r>
-              <a:rPr lang="en-US" altLang="ko-KR" sz="4800" b="1" spc="-300" dirty="0">
-                <a:ln w="9525">
-                  <a:solidFill>
-                    <a:prstClr val="black"/>
-                  </a:solidFill>
-                </a:ln>
-                <a:solidFill>
-                  <a:srgbClr val="FFFF00"/>
-                </a:solidFill>
-                <a:latin typeface="휴먼모음T" panose="02030504000101010101" pitchFamily="18" charset="-127"/>
-                <a:ea typeface="휴먼모음T" panose="02030504000101010101" pitchFamily="18" charset="-127"/>
-              </a:rPr>
-              <a:t>(</a:t>
-            </a:r>
-            <a:r>
-              <a:rPr lang="ko-KR" altLang="en-US" sz="4800" b="1" spc="-300" dirty="0">
-                <a:ln w="9525">
-                  <a:solidFill>
-                    <a:prstClr val="black"/>
-                  </a:solidFill>
-                </a:ln>
-                <a:solidFill>
-                  <a:srgbClr val="FFFF00"/>
-                </a:solidFill>
-                <a:latin typeface="휴먼모음T" panose="02030504000101010101" pitchFamily="18" charset="-127"/>
-                <a:ea typeface="휴먼모음T" panose="02030504000101010101" pitchFamily="18" charset="-127"/>
-              </a:rPr>
-              <a:t>이어서 </a:t>
-            </a:r>
-            <a:r>
-              <a:rPr lang="en-US" altLang="ko-KR" sz="4800" b="1" spc="-300" dirty="0">
-                <a:ln w="9525">
-                  <a:solidFill>
-                    <a:prstClr val="black"/>
-                  </a:solidFill>
-                </a:ln>
-                <a:solidFill>
-                  <a:srgbClr val="FFFF00"/>
-                </a:solidFill>
-                <a:latin typeface="휴먼모음T" panose="02030504000101010101" pitchFamily="18" charset="-127"/>
-                <a:ea typeface="휴먼모음T" panose="02030504000101010101" pitchFamily="18" charset="-127"/>
-              </a:rPr>
-              <a:t>A1 </a:t>
-            </a:r>
-            <a:r>
-              <a:rPr lang="ko-KR" altLang="en-US" sz="4800" b="1" spc="-300" dirty="0">
-                <a:ln w="9525">
-                  <a:solidFill>
-                    <a:prstClr val="black"/>
-                  </a:solidFill>
-                </a:ln>
-                <a:solidFill>
-                  <a:srgbClr val="FFFF00"/>
-                </a:solidFill>
-                <a:latin typeface="휴먼모음T" panose="02030504000101010101" pitchFamily="18" charset="-127"/>
-                <a:ea typeface="휴먼모음T" panose="02030504000101010101" pitchFamily="18" charset="-127"/>
-              </a:rPr>
-              <a:t>시작</a:t>
-            </a:r>
-            <a:r>
-              <a:rPr lang="en-US" altLang="ko-KR" sz="4800" b="1" spc="-300" dirty="0">
-                <a:ln w="9525">
-                  <a:solidFill>
-                    <a:prstClr val="black"/>
-                  </a:solidFill>
-                </a:ln>
-                <a:solidFill>
-                  <a:srgbClr val="FFFF00"/>
-                </a:solidFill>
-                <a:latin typeface="휴먼모음T" panose="02030504000101010101" pitchFamily="18" charset="-127"/>
-                <a:ea typeface="휴먼모음T" panose="02030504000101010101" pitchFamily="18" charset="-127"/>
-              </a:rPr>
-              <a:t>)</a:t>
-            </a:r>
-          </a:p>
-        </p:txBody>
-      </p:sp>
-    </p:spTree>
-    <p:extLst>
-      <p:ext uri="{BB962C8B-B14F-4D97-AF65-F5344CB8AC3E}">
-        <p14:creationId xmlns:p14="http://schemas.microsoft.com/office/powerpoint/2010/main" val="3858893463"/>
       </p:ext>
     </p:extLst>
   </p:cSld>
